--- a/weekly_report_template/out/template.pptx
+++ b/weekly_report_template/out/template.pptx
@@ -657,10 +657,10 @@
           <a:gradFill rotWithShape="1">
             <a:gsLst>
               <a:gs pos="0">
-                <a:srgbClr val="0B1F3F"/>
+                <a:srgbClr val="273470"/>
               </a:gs>
               <a:gs pos="100000">
-                <a:srgbClr val="14315E"/>
+                <a:srgbClr val="1B2452"/>
               </a:gs>
             </a:gsLst>
             <a:lin ang="1200000" scaled="0"/>
@@ -686,8 +686,8 @@
           </a:prstGeom>
           <a:ln w="6350" cap="rnd">
             <a:solidFill>
-              <a:srgbClr val="12A5A8">
-                <a:alpha val="35000"/>
+              <a:srgbClr val="66CCFF">
+                <a:alpha val="38000"/>
               </a:srgbClr>
             </a:solidFill>
             <a:round/>
@@ -710,8 +710,8 @@
           </a:prstGeom>
           <a:ln w="6350" cap="rnd">
             <a:solidFill>
-              <a:srgbClr val="12A5A8">
-                <a:alpha val="35000"/>
+              <a:srgbClr val="66CCFF">
+                <a:alpha val="38000"/>
               </a:srgbClr>
             </a:solidFill>
             <a:round/>
@@ -734,8 +734,8 @@
           </a:prstGeom>
           <a:ln w="6350" cap="rnd">
             <a:solidFill>
-              <a:srgbClr val="12A5A8">
-                <a:alpha val="35000"/>
+              <a:srgbClr val="66CCFF">
+                <a:alpha val="38000"/>
               </a:srgbClr>
             </a:solidFill>
             <a:round/>
@@ -758,8 +758,8 @@
           </a:prstGeom>
           <a:ln w="6350" cap="rnd">
             <a:solidFill>
-              <a:srgbClr val="12A5A8">
-                <a:alpha val="35000"/>
+              <a:srgbClr val="66CCFF">
+                <a:alpha val="38000"/>
               </a:srgbClr>
             </a:solidFill>
             <a:round/>
@@ -782,8 +782,8 @@
           </a:prstGeom>
           <a:ln w="6350" cap="rnd">
             <a:solidFill>
-              <a:srgbClr val="12A5A8">
-                <a:alpha val="35000"/>
+              <a:srgbClr val="66CCFF">
+                <a:alpha val="38000"/>
               </a:srgbClr>
             </a:solidFill>
             <a:round/>
@@ -806,8 +806,8 @@
           </a:prstGeom>
           <a:ln w="6350" cap="rnd">
             <a:solidFill>
-              <a:srgbClr val="12A5A8">
-                <a:alpha val="35000"/>
+              <a:srgbClr val="66CCFF">
+                <a:alpha val="38000"/>
               </a:srgbClr>
             </a:solidFill>
             <a:round/>
@@ -830,8 +830,8 @@
           </a:prstGeom>
           <a:ln w="6350" cap="rnd">
             <a:solidFill>
-              <a:srgbClr val="12A5A8">
-                <a:alpha val="35000"/>
+              <a:srgbClr val="66CCFF">
+                <a:alpha val="38000"/>
               </a:srgbClr>
             </a:solidFill>
             <a:round/>
@@ -854,8 +854,8 @@
           </a:prstGeom>
           <a:ln w="6350" cap="rnd">
             <a:solidFill>
-              <a:srgbClr val="12A5A8">
-                <a:alpha val="35000"/>
+              <a:srgbClr val="66CCFF">
+                <a:alpha val="38000"/>
               </a:srgbClr>
             </a:solidFill>
             <a:round/>
@@ -877,8 +877,8 @@
             <a:avLst/>
           </a:prstGeom>
           <a:solidFill>
-            <a:srgbClr val="12A5A8">
-              <a:alpha val="60000"/>
+            <a:srgbClr val="66CCFF">
+              <a:alpha val="65000"/>
             </a:srgbClr>
           </a:solidFill>
           <a:ln>
@@ -901,8 +901,8 @@
             <a:avLst/>
           </a:prstGeom>
           <a:solidFill>
-            <a:srgbClr val="12A5A8">
-              <a:alpha val="60000"/>
+            <a:srgbClr val="66CCFF">
+              <a:alpha val="65000"/>
             </a:srgbClr>
           </a:solidFill>
           <a:ln>
@@ -925,8 +925,8 @@
             <a:avLst/>
           </a:prstGeom>
           <a:solidFill>
-            <a:srgbClr val="12A5A8">
-              <a:alpha val="60000"/>
+            <a:srgbClr val="66CCFF">
+              <a:alpha val="65000"/>
             </a:srgbClr>
           </a:solidFill>
           <a:ln>
@@ -949,8 +949,8 @@
             <a:avLst/>
           </a:prstGeom>
           <a:solidFill>
-            <a:srgbClr val="12A5A8">
-              <a:alpha val="60000"/>
+            <a:srgbClr val="66CCFF">
+              <a:alpha val="65000"/>
             </a:srgbClr>
           </a:solidFill>
           <a:ln>
@@ -973,8 +973,8 @@
             <a:avLst/>
           </a:prstGeom>
           <a:solidFill>
-            <a:srgbClr val="12A5A8">
-              <a:alpha val="60000"/>
+            <a:srgbClr val="66CCFF">
+              <a:alpha val="65000"/>
             </a:srgbClr>
           </a:solidFill>
           <a:ln>
@@ -997,8 +997,8 @@
             <a:avLst/>
           </a:prstGeom>
           <a:solidFill>
-            <a:srgbClr val="12A5A8">
-              <a:alpha val="60000"/>
+            <a:srgbClr val="66CCFF">
+              <a:alpha val="65000"/>
             </a:srgbClr>
           </a:solidFill>
           <a:ln>
@@ -1021,8 +1021,8 @@
             <a:avLst/>
           </a:prstGeom>
           <a:solidFill>
-            <a:srgbClr val="12A5A8">
-              <a:alpha val="60000"/>
+            <a:srgbClr val="66CCFF">
+              <a:alpha val="65000"/>
             </a:srgbClr>
           </a:solidFill>
           <a:ln>
@@ -1045,8 +1045,8 @@
             <a:avLst/>
           </a:prstGeom>
           <a:solidFill>
-            <a:srgbClr val="12A5A8">
-              <a:alpha val="60000"/>
+            <a:srgbClr val="66CCFF">
+              <a:alpha val="65000"/>
             </a:srgbClr>
           </a:solidFill>
           <a:ln>
@@ -1069,8 +1069,8 @@
             <a:avLst/>
           </a:prstGeom>
           <a:solidFill>
-            <a:srgbClr val="12A5A8">
-              <a:alpha val="60000"/>
+            <a:srgbClr val="66CCFF">
+              <a:alpha val="65000"/>
             </a:srgbClr>
           </a:solidFill>
           <a:ln>
@@ -1233,10 +1233,10 @@
           <a:gradFill rotWithShape="1">
             <a:gsLst>
               <a:gs pos="0">
-                <a:srgbClr val="12A5A8"/>
+                <a:srgbClr val="33CC99"/>
               </a:gs>
               <a:gs pos="100000">
-                <a:srgbClr val="6CC04A"/>
+                <a:srgbClr val="99D633"/>
               </a:gs>
             </a:gsLst>
             <a:lin ang="0" scaled="0"/>
@@ -1253,11 +1253,9 @@
               <a:buNone/>
             </a:pPr>
             <a:r>
-              <a:rPr lang="ar-SA" sz="950" dirty="0">
-                <a:solidFill>
-                  <a:srgbClr val="FFFFFF">
-                    <a:alpha val="88000"/>
-                  </a:srgbClr>
+              <a:rPr lang="ar-SA" sz="950" b="1" dirty="0">
+                <a:solidFill>
+                  <a:srgbClr val="273470"/>
                 </a:solidFill>
                 <a:latin typeface="IBM Plex Sans Arabic"/>
                 <a:cs typeface="IBM Plex Sans Arabic"/>
@@ -1267,7 +1265,7 @@
             <a:fld id="{B6F15528-21DE-4FAA-801E-634DDDAF4B2B}" type="slidenum">
               <a:rPr lang="en-US" sz="2200" b="1" dirty="0">
                 <a:solidFill>
-                  <a:srgbClr val="FFFFFF"/>
+                  <a:srgbClr val="273470"/>
                 </a:solidFill>
                 <a:latin typeface="IBM Plex Sans Arabic"/>
                 <a:cs typeface="IBM Plex Sans Arabic"/>
@@ -1285,8 +1283,8 @@
         </p:nvSpPr>
         <p:spPr>
           <a:xfrm>
-            <a:off x="4992000" y="1098000"/>
-            <a:ext cx="2136000" cy="144000"/>
+            <a:off x="4992000" y="1080000"/>
+            <a:ext cx="2136000" cy="162000"/>
           </a:xfrm>
           <a:prstGeom prst="rect">
             <a:avLst/>
@@ -1304,9 +1302,9 @@
               <a:buNone/>
             </a:pPr>
             <a:r>
-              <a:rPr lang="ar-SA" sz="750" b="1" dirty="0">
-                <a:solidFill>
-                  <a:srgbClr val="12A5A8"/>
+              <a:rPr lang="ar-SA" sz="850" b="1" dirty="0">
+                <a:solidFill>
+                  <a:srgbClr val="33CC99"/>
                 </a:solidFill>
                 <a:latin typeface="IBM Plex Sans Arabic"/>
                 <a:cs typeface="IBM Plex Sans Arabic"/>
@@ -1374,8 +1372,8 @@
         </p:nvSpPr>
         <p:spPr>
           <a:xfrm>
-            <a:off x="2712000" y="1098000"/>
-            <a:ext cx="2136000" cy="144000"/>
+            <a:off x="2712000" y="1080000"/>
+            <a:ext cx="2136000" cy="162000"/>
           </a:xfrm>
           <a:prstGeom prst="rect">
             <a:avLst/>
@@ -1393,9 +1391,9 @@
               <a:buNone/>
             </a:pPr>
             <a:r>
-              <a:rPr lang="ar-SA" sz="750" b="1" dirty="0">
-                <a:solidFill>
-                  <a:srgbClr val="12A5A8"/>
+              <a:rPr lang="ar-SA" sz="850" b="1" dirty="0">
+                <a:solidFill>
+                  <a:srgbClr val="33CC99"/>
                 </a:solidFill>
                 <a:latin typeface="IBM Plex Sans Arabic"/>
                 <a:cs typeface="IBM Plex Sans Arabic"/>
@@ -1463,8 +1461,8 @@
         </p:nvSpPr>
         <p:spPr>
           <a:xfrm>
-            <a:off x="432000" y="1098000"/>
-            <a:ext cx="2136000" cy="144000"/>
+            <a:off x="432000" y="1080000"/>
+            <a:ext cx="2136000" cy="162000"/>
           </a:xfrm>
           <a:prstGeom prst="rect">
             <a:avLst/>
@@ -1482,9 +1480,9 @@
               <a:buNone/>
             </a:pPr>
             <a:r>
-              <a:rPr lang="ar-SA" sz="750" b="1" dirty="0">
-                <a:solidFill>
-                  <a:srgbClr val="12A5A8"/>
+              <a:rPr lang="ar-SA" sz="850" b="1" dirty="0">
+                <a:solidFill>
+                  <a:srgbClr val="33CC99"/>
                 </a:solidFill>
                 <a:latin typeface="IBM Plex Sans Arabic"/>
                 <a:cs typeface="IBM Plex Sans Arabic"/>
@@ -1573,7 +1571,7 @@
             <a:r>
               <a:rPr lang="ar-SA" sz="900" b="1" dirty="0">
                 <a:solidFill>
-                  <a:srgbClr val="0E7C86"/>
+                  <a:srgbClr val="0E8A8A"/>
                 </a:solidFill>
                 <a:latin typeface="IBM Plex Sans Arabic"/>
                 <a:cs typeface="IBM Plex Sans Arabic"/>
@@ -1618,7 +1616,7 @@
               <a:buNone/>
               <a:defRPr lang="ar-SA" sz="1250" dirty="0">
                 <a:solidFill>
-                  <a:srgbClr val="1C2B3A"/>
+                  <a:srgbClr val="1F2A37"/>
                 </a:solidFill>
                 <a:latin typeface="IBM Plex Sans Arabic"/>
                 <a:cs typeface="IBM Plex Sans Arabic"/>
@@ -1650,7 +1648,7 @@
             </a:avLst>
           </a:prstGeom>
           <a:solidFill>
-            <a:srgbClr val="EEF2F8"/>
+            <a:srgbClr val="EEF0F8"/>
           </a:solidFill>
           <a:ln>
             <a:noFill/>
@@ -1690,7 +1688,7 @@
               <a:buNone/>
               <a:defRPr lang="ar-SA" sz="2200" b="1" dirty="0">
                 <a:solidFill>
-                  <a:srgbClr val="6CC04A"/>
+                  <a:srgbClr val="178F6B"/>
                 </a:solidFill>
                 <a:latin typeface="IBM Plex Sans Arabic"/>
                 <a:cs typeface="IBM Plex Sans Arabic"/>
@@ -1735,7 +1733,7 @@
               <a:buNone/>
             </a:pPr>
             <a:r>
-              <a:rPr lang="ar-SA" sz="800" dirty="0">
+              <a:rPr lang="ar-SA" sz="850" dirty="0">
                 <a:solidFill>
                   <a:srgbClr val="5F6B7A"/>
                 </a:solidFill>
@@ -1764,7 +1762,7 @@
             </a:avLst>
           </a:prstGeom>
           <a:solidFill>
-            <a:srgbClr val="EEF2F8"/>
+            <a:srgbClr val="EEF0F8"/>
           </a:solidFill>
           <a:ln>
             <a:noFill/>
@@ -1804,7 +1802,7 @@
               <a:buNone/>
               <a:defRPr lang="ar-SA" sz="2200" b="1" dirty="0">
                 <a:solidFill>
-                  <a:srgbClr val="12A5A8"/>
+                  <a:srgbClr val="0E8A8A"/>
                 </a:solidFill>
                 <a:latin typeface="IBM Plex Sans Arabic"/>
                 <a:cs typeface="IBM Plex Sans Arabic"/>
@@ -1849,7 +1847,7 @@
               <a:buNone/>
             </a:pPr>
             <a:r>
-              <a:rPr lang="ar-SA" sz="800" dirty="0">
+              <a:rPr lang="ar-SA" sz="850" dirty="0">
                 <a:solidFill>
                   <a:srgbClr val="5F6B7A"/>
                 </a:solidFill>
@@ -1878,7 +1876,7 @@
             </a:avLst>
           </a:prstGeom>
           <a:solidFill>
-            <a:srgbClr val="EEF2F8"/>
+            <a:srgbClr val="EEF0F8"/>
           </a:solidFill>
           <a:ln>
             <a:noFill/>
@@ -1918,7 +1916,7 @@
               <a:buNone/>
               <a:defRPr lang="ar-SA" sz="2200" b="1" dirty="0">
                 <a:solidFill>
-                  <a:srgbClr val="0B1F3F"/>
+                  <a:srgbClr val="6459A7"/>
                 </a:solidFill>
                 <a:latin typeface="IBM Plex Sans Arabic"/>
                 <a:cs typeface="IBM Plex Sans Arabic"/>
@@ -1963,7 +1961,7 @@
               <a:buNone/>
             </a:pPr>
             <a:r>
-              <a:rPr lang="ar-SA" sz="800" dirty="0">
+              <a:rPr lang="ar-SA" sz="850" dirty="0">
                 <a:solidFill>
                   <a:srgbClr val="5F6B7A"/>
                 </a:solidFill>
@@ -1990,7 +1988,7 @@
             <a:avLst/>
           </a:prstGeom>
           <a:solidFill>
-            <a:srgbClr val="6CC04A"/>
+            <a:srgbClr val="33CC99"/>
           </a:solidFill>
           <a:ln>
             <a:noFill/>
@@ -2048,7 +2046,7 @@
             <a:r>
               <a:rPr lang="ar-SA" sz="1250" b="1" dirty="0">
                 <a:solidFill>
-                  <a:srgbClr val="0B1F3F"/>
+                  <a:srgbClr val="273470"/>
                 </a:solidFill>
                 <a:latin typeface="IBM Plex Sans Arabic"/>
                 <a:cs typeface="IBM Plex Sans Arabic"/>
@@ -2071,7 +2069,7 @@
         <p:spPr>
           <a:xfrm>
             <a:off x="432000" y="3564000"/>
-            <a:ext cx="6696000" cy="1512000"/>
+            <a:ext cx="6696000" cy="1440000"/>
           </a:xfrm>
           <a:prstGeom prst="rect">
             <a:avLst/>
@@ -2091,17 +2089,17 @@
                 <a:spcPts val="250"/>
               </a:spcAft>
               <a:buClr>
-                <a:srgbClr val="6CC04A"/>
+                <a:srgbClr val="33CC99"/>
               </a:buClr>
               <a:buSzPct val="110000"/>
               <a:buFont typeface="Arial" pitchFamily="34" charset="0"/>
               <a:buChar char="•"/>
               <a:defRPr lang="ar-SA" sz="1200" dirty="0">
                 <a:solidFill>
-                  <a:srgbClr val="1C2B3A"/>
-                </a:solidFill>
-                <a:latin typeface="IBM Plex Sans Arabic"/>
-                <a:cs typeface="IBM Plex Sans Arabic"/>
+                  <a:srgbClr val="1F2A37"/>
+                </a:solidFill>
+                <a:latin typeface="IBM Plex Sans Arabic Medium"/>
+                <a:cs typeface="IBM Plex Sans Arabic Medium"/>
               </a:defRPr>
             </a:lvl1pPr>
             <a:lvl2pPr marL="342000" indent="-162000" algn="r" rtl="1">
@@ -2121,8 +2119,8 @@
                 <a:solidFill>
                   <a:srgbClr val="5F6B7A"/>
                 </a:solidFill>
-                <a:latin typeface="IBM Plex Sans Arabic"/>
-                <a:cs typeface="IBM Plex Sans Arabic"/>
+                <a:latin typeface="IBM Plex Sans Arabic Medium"/>
+                <a:cs typeface="IBM Plex Sans Arabic Medium"/>
               </a:defRPr>
             </a:lvl2pPr>
           </a:lstStyle>
@@ -2142,14 +2140,14 @@
         </p:nvSpPr>
         <p:spPr>
           <a:xfrm>
-            <a:off x="6998400" y="5302800"/>
+            <a:off x="6998400" y="5266800"/>
             <a:ext cx="129600" cy="129600"/>
           </a:xfrm>
           <a:prstGeom prst="ellipse">
             <a:avLst/>
           </a:prstGeom>
           <a:solidFill>
-            <a:srgbClr val="12A5A8"/>
+            <a:srgbClr val="0E8A8A"/>
           </a:solidFill>
           <a:ln>
             <a:noFill/>
@@ -2164,7 +2162,7 @@
         </p:nvSpPr>
         <p:spPr>
           <a:xfrm>
-            <a:off x="7038000" y="5342400"/>
+            <a:off x="7038000" y="5306400"/>
             <a:ext cx="50400" cy="50400"/>
           </a:xfrm>
           <a:prstGeom prst="ellipse">
@@ -2186,7 +2184,7 @@
         </p:nvSpPr>
         <p:spPr>
           <a:xfrm>
-            <a:off x="2606400" y="5248800"/>
+            <a:off x="2606400" y="5212800"/>
             <a:ext cx="4320000" cy="230400"/>
           </a:xfrm>
           <a:prstGeom prst="rect">
@@ -2207,7 +2205,7 @@
             <a:r>
               <a:rPr lang="ar-SA" sz="1250" b="1" dirty="0">
                 <a:solidFill>
-                  <a:srgbClr val="0B1F3F"/>
+                  <a:srgbClr val="273470"/>
                 </a:solidFill>
                 <a:latin typeface="IBM Plex Sans Arabic"/>
                 <a:cs typeface="IBM Plex Sans Arabic"/>
@@ -2225,14 +2223,14 @@
         </p:nvSpPr>
         <p:spPr>
           <a:xfrm>
-            <a:off x="6998400" y="7228800"/>
+            <a:off x="6998400" y="7246800"/>
             <a:ext cx="129600" cy="129600"/>
           </a:xfrm>
           <a:prstGeom prst="ellipse">
             <a:avLst/>
           </a:prstGeom>
           <a:solidFill>
-            <a:srgbClr val="0B1F3F"/>
+            <a:srgbClr val="6459A7"/>
           </a:solidFill>
           <a:ln>
             <a:noFill/>
@@ -2247,7 +2245,7 @@
         </p:nvSpPr>
         <p:spPr>
           <a:xfrm>
-            <a:off x="7038000" y="7268400"/>
+            <a:off x="7038000" y="7286400"/>
             <a:ext cx="50400" cy="50400"/>
           </a:xfrm>
           <a:prstGeom prst="ellipse">
@@ -2269,7 +2267,7 @@
         </p:nvSpPr>
         <p:spPr>
           <a:xfrm>
-            <a:off x="2606400" y="7174800"/>
+            <a:off x="2606400" y="7192800"/>
             <a:ext cx="4320000" cy="230400"/>
           </a:xfrm>
           <a:prstGeom prst="rect">
@@ -2290,7 +2288,7 @@
             <a:r>
               <a:rPr lang="ar-SA" sz="1250" b="1" dirty="0">
                 <a:solidFill>
-                  <a:srgbClr val="0B1F3F"/>
+                  <a:srgbClr val="273470"/>
                 </a:solidFill>
                 <a:latin typeface="IBM Plex Sans Arabic"/>
                 <a:cs typeface="IBM Plex Sans Arabic"/>
@@ -2312,8 +2310,8 @@
         </p:nvSpPr>
         <p:spPr>
           <a:xfrm>
-            <a:off x="432000" y="7452000"/>
-            <a:ext cx="6696000" cy="1188000"/>
+            <a:off x="432000" y="7470000"/>
+            <a:ext cx="6696000" cy="1170000"/>
           </a:xfrm>
           <a:prstGeom prst="rect">
             <a:avLst/>
@@ -2333,17 +2331,17 @@
                 <a:spcPts val="250"/>
               </a:spcAft>
               <a:buClr>
-                <a:srgbClr val="0B1F3F"/>
+                <a:srgbClr val="6459A7"/>
               </a:buClr>
               <a:buSzPct val="110000"/>
               <a:buFont typeface="Arial" pitchFamily="34" charset="0"/>
               <a:buChar char="•"/>
               <a:defRPr lang="ar-SA" sz="1200" dirty="0">
                 <a:solidFill>
-                  <a:srgbClr val="1C2B3A"/>
-                </a:solidFill>
-                <a:latin typeface="IBM Plex Sans Arabic"/>
-                <a:cs typeface="IBM Plex Sans Arabic"/>
+                  <a:srgbClr val="1F2A37"/>
+                </a:solidFill>
+                <a:latin typeface="IBM Plex Sans Arabic Medium"/>
+                <a:cs typeface="IBM Plex Sans Arabic Medium"/>
               </a:defRPr>
             </a:lvl1pPr>
             <a:lvl2pPr marL="342000" indent="-162000" algn="r" rtl="1">
@@ -2363,8 +2361,8 @@
                 <a:solidFill>
                   <a:srgbClr val="5F6B7A"/>
                 </a:solidFill>
-                <a:latin typeface="IBM Plex Sans Arabic"/>
-                <a:cs typeface="IBM Plex Sans Arabic"/>
+                <a:latin typeface="IBM Plex Sans Arabic Medium"/>
+                <a:cs typeface="IBM Plex Sans Arabic Medium"/>
               </a:defRPr>
             </a:lvl2pPr>
           </a:lstStyle>
@@ -2393,7 +2391,7 @@
             </a:avLst>
           </a:prstGeom>
           <a:solidFill>
-            <a:srgbClr val="E6F5F5"/>
+            <a:srgbClr val="E8F7F1"/>
           </a:solidFill>
           <a:ln>
             <a:noFill/>
@@ -2429,7 +2427,7 @@
             <a:r>
               <a:rPr lang="ar-SA" sz="1050" b="1" dirty="0">
                 <a:solidFill>
-                  <a:srgbClr val="0E7C86"/>
+                  <a:srgbClr val="0E8A8A"/>
                 </a:solidFill>
                 <a:latin typeface="IBM Plex Sans Arabic"/>
                 <a:cs typeface="IBM Plex Sans Arabic"/>
@@ -2474,10 +2472,10 @@
               <a:buNone/>
               <a:defRPr lang="ar-SA" sz="1100" dirty="0">
                 <a:solidFill>
-                  <a:srgbClr val="1C2B3A"/>
-                </a:solidFill>
-                <a:latin typeface="IBM Plex Sans Arabic"/>
-                <a:cs typeface="IBM Plex Sans Arabic"/>
+                  <a:srgbClr val="1F2A37"/>
+                </a:solidFill>
+                <a:latin typeface="IBM Plex Sans Arabic Medium"/>
+                <a:cs typeface="IBM Plex Sans Arabic Medium"/>
               </a:defRPr>
             </a:lvl1pPr>
           </a:lstStyle>
@@ -2585,12 +2583,12 @@
                 <a:spcPts val="0"/>
               </a:spcAft>
               <a:buNone/>
-              <a:defRPr lang="ar-SA" sz="1000" dirty="0">
+              <a:defRPr lang="ar-SA" sz="1050" dirty="0">
                 <a:solidFill>
                   <a:srgbClr val="5F6B7A"/>
                 </a:solidFill>
-                <a:latin typeface="IBM Plex Sans Arabic"/>
-                <a:cs typeface="IBM Plex Sans Arabic"/>
+                <a:latin typeface="IBM Plex Sans Arabic Medium"/>
+                <a:cs typeface="IBM Plex Sans Arabic Medium"/>
               </a:defRPr>
             </a:lvl1pPr>
           </a:lstStyle>
@@ -2618,7 +2616,7 @@
           </a:prstGeom>
           <a:ln w="6350" cap="rnd">
             <a:solidFill>
-              <a:srgbClr val="D9DEE5"/>
+              <a:srgbClr val="DDE1E8"/>
             </a:solidFill>
             <a:round/>
           </a:ln>
@@ -2657,7 +2655,7 @@
                 <a:spcPts val="0"/>
               </a:spcAft>
               <a:buNone/>
-              <a:defRPr lang="ar-SA" sz="900" dirty="0">
+              <a:defRPr lang="ar-SA" sz="950" dirty="0">
                 <a:solidFill>
                   <a:srgbClr val="5F6B7A"/>
                 </a:solidFill>
@@ -2701,9 +2699,9 @@
               <a:buNone/>
             </a:pPr>
             <a:r>
-              <a:rPr lang="ar-SA" sz="700" dirty="0">
-                <a:solidFill>
-                  <a:srgbClr val="8A95A3"/>
+              <a:rPr lang="ar-SA" sz="800" dirty="0">
+                <a:solidFill>
+                  <a:srgbClr val="6C727E"/>
                 </a:solidFill>
                 <a:latin typeface="IBM Plex Sans Arabic"/>
                 <a:cs typeface="IBM Plex Sans Arabic"/>
@@ -3538,8 +3536,8 @@
           <p:nvPr/>
         </p:nvGraphicFramePr>
         <p:xfrm>
-          <a:off x="432000" y="5544000"/>
-          <a:ext cx="6696000" cy="1422000"/>
+          <a:off x="432000" y="5472000"/>
+          <a:ext cx="6696000" cy="1494000"/>
         </p:xfrm>
         <a:graphic>
           <a:graphicData uri="http://schemas.openxmlformats.org/drawingml/2006/table">
@@ -3566,7 +3564,7 @@
                       <a:r>
                         <a:rPr lang="ar-SA" sz="950" b="1" dirty="0">
                           <a:solidFill>
-                            <a:srgbClr val="0B1F3F"/>
+                            <a:srgbClr val="273470"/>
                           </a:solidFill>
                           <a:latin typeface="IBM Plex Sans Arabic"/>
                           <a:cs typeface="IBM Plex Sans Arabic"/>
@@ -3587,12 +3585,12 @@
                     </a:lnT>
                     <a:lnB w="6350" cap="flat" cmpd="sng" algn="ctr">
                       <a:solidFill>
-                        <a:srgbClr val="12A5A8"/>
+                        <a:srgbClr val="33CC99"/>
                       </a:solidFill>
                       <a:prstDash val="solid"/>
                     </a:lnB>
                     <a:solidFill>
-                      <a:srgbClr val="EEF2F8"/>
+                      <a:srgbClr val="EEF0F8"/>
                     </a:solidFill>
                   </a:tcPr>
                 </a:tc>
@@ -3610,7 +3608,7 @@
                       <a:r>
                         <a:rPr lang="ar-SA" sz="950" b="1" dirty="0">
                           <a:solidFill>
-                            <a:srgbClr val="0B1F3F"/>
+                            <a:srgbClr val="273470"/>
                           </a:solidFill>
                           <a:latin typeface="IBM Plex Sans Arabic"/>
                           <a:cs typeface="IBM Plex Sans Arabic"/>
@@ -3631,12 +3629,12 @@
                     </a:lnT>
                     <a:lnB w="6350" cap="flat" cmpd="sng" algn="ctr">
                       <a:solidFill>
-                        <a:srgbClr val="12A5A8"/>
+                        <a:srgbClr val="33CC99"/>
                       </a:solidFill>
                       <a:prstDash val="solid"/>
                     </a:lnB>
                     <a:solidFill>
-                      <a:srgbClr val="EEF2F8"/>
+                      <a:srgbClr val="EEF0F8"/>
                     </a:solidFill>
                   </a:tcPr>
                 </a:tc>
@@ -3654,7 +3652,7 @@
                       <a:r>
                         <a:rPr lang="ar-SA" sz="950" b="1" dirty="0">
                           <a:solidFill>
-                            <a:srgbClr val="0B1F3F"/>
+                            <a:srgbClr val="273470"/>
                           </a:solidFill>
                           <a:latin typeface="IBM Plex Sans Arabic"/>
                           <a:cs typeface="IBM Plex Sans Arabic"/>
@@ -3675,12 +3673,12 @@
                     </a:lnT>
                     <a:lnB w="6350" cap="flat" cmpd="sng" algn="ctr">
                       <a:solidFill>
-                        <a:srgbClr val="12A5A8"/>
+                        <a:srgbClr val="33CC99"/>
                       </a:solidFill>
                       <a:prstDash val="solid"/>
                     </a:lnB>
                     <a:solidFill>
-                      <a:srgbClr val="EEF2F8"/>
+                      <a:srgbClr val="EEF0F8"/>
                     </a:solidFill>
                   </a:tcPr>
                 </a:tc>
@@ -3698,7 +3696,7 @@
                       <a:r>
                         <a:rPr lang="ar-SA" sz="950" b="1" dirty="0">
                           <a:solidFill>
-                            <a:srgbClr val="0B1F3F"/>
+                            <a:srgbClr val="273470"/>
                           </a:solidFill>
                           <a:latin typeface="IBM Plex Sans Arabic"/>
                           <a:cs typeface="IBM Plex Sans Arabic"/>
@@ -3719,17 +3717,17 @@
                     </a:lnT>
                     <a:lnB w="6350" cap="flat" cmpd="sng" algn="ctr">
                       <a:solidFill>
-                        <a:srgbClr val="12A5A8"/>
+                        <a:srgbClr val="33CC99"/>
                       </a:solidFill>
                       <a:prstDash val="solid"/>
                     </a:lnB>
                     <a:solidFill>
-                      <a:srgbClr val="EEF2F8"/>
+                      <a:srgbClr val="EEF0F8"/>
                     </a:solidFill>
                   </a:tcPr>
                 </a:tc>
               </a:tr>
-              <a:tr h="288000">
+              <a:tr h="306000">
                 <a:tc>
                   <a:txBody>
                     <a:bodyPr/>
@@ -3745,8 +3743,8 @@
                         <a:solidFill>
                           <a:srgbClr val="5F6B7A"/>
                         </a:solidFill>
-                        <a:latin typeface="IBM Plex Sans Arabic"/>
-                        <a:cs typeface="IBM Plex Sans Arabic"/>
+                        <a:latin typeface="IBM Plex Sans Arabic Medium"/>
+                        <a:cs typeface="IBM Plex Sans Arabic Medium"/>
                       </a:endParaRPr>
                     </a:p>
                   </a:txBody>
@@ -3762,7 +3760,7 @@
                     </a:lnT>
                     <a:lnB w="6350" cap="flat" cmpd="sng" algn="ctr">
                       <a:solidFill>
-                        <a:srgbClr val="D9DEE5"/>
+                        <a:srgbClr val="DDE1E8"/>
                       </a:solidFill>
                       <a:prstDash val="solid"/>
                     </a:lnB>
@@ -3784,8 +3782,8 @@
                         <a:solidFill>
                           <a:srgbClr val="5F6B7A"/>
                         </a:solidFill>
-                        <a:latin typeface="IBM Plex Sans Arabic"/>
-                        <a:cs typeface="IBM Plex Sans Arabic"/>
+                        <a:latin typeface="IBM Plex Sans Arabic Medium"/>
+                        <a:cs typeface="IBM Plex Sans Arabic Medium"/>
                       </a:endParaRPr>
                     </a:p>
                   </a:txBody>
@@ -3801,7 +3799,7 @@
                     </a:lnT>
                     <a:lnB w="6350" cap="flat" cmpd="sng" algn="ctr">
                       <a:solidFill>
-                        <a:srgbClr val="D9DEE5"/>
+                        <a:srgbClr val="DDE1E8"/>
                       </a:solidFill>
                       <a:prstDash val="solid"/>
                     </a:lnB>
@@ -3823,8 +3821,8 @@
                         <a:solidFill>
                           <a:srgbClr val="5F6B7A"/>
                         </a:solidFill>
-                        <a:latin typeface="IBM Plex Sans Arabic"/>
-                        <a:cs typeface="IBM Plex Sans Arabic"/>
+                        <a:latin typeface="IBM Plex Sans Arabic Medium"/>
+                        <a:cs typeface="IBM Plex Sans Arabic Medium"/>
                       </a:endParaRPr>
                     </a:p>
                   </a:txBody>
@@ -3840,7 +3838,7 @@
                     </a:lnT>
                     <a:lnB w="6350" cap="flat" cmpd="sng" algn="ctr">
                       <a:solidFill>
-                        <a:srgbClr val="D9DEE5"/>
+                        <a:srgbClr val="DDE1E8"/>
                       </a:solidFill>
                       <a:prstDash val="solid"/>
                     </a:lnB>
@@ -3860,10 +3858,10 @@
                       </a:pPr>
                       <a:endParaRPr lang="ar-SA" sz="1100" dirty="0">
                         <a:solidFill>
-                          <a:srgbClr val="1C2B3A"/>
+                          <a:srgbClr val="1F2A37"/>
                         </a:solidFill>
-                        <a:latin typeface="IBM Plex Sans Arabic"/>
-                        <a:cs typeface="IBM Plex Sans Arabic"/>
+                        <a:latin typeface="IBM Plex Sans Arabic Medium"/>
+                        <a:cs typeface="IBM Plex Sans Arabic Medium"/>
                       </a:endParaRPr>
                     </a:p>
                   </a:txBody>
@@ -3879,7 +3877,7 @@
                     </a:lnT>
                     <a:lnB w="6350" cap="flat" cmpd="sng" algn="ctr">
                       <a:solidFill>
-                        <a:srgbClr val="D9DEE5"/>
+                        <a:srgbClr val="DDE1E8"/>
                       </a:solidFill>
                       <a:prstDash val="solid"/>
                     </a:lnB>
@@ -3887,7 +3885,7 @@
                   </a:tcPr>
                 </a:tc>
               </a:tr>
-              <a:tr h="288000">
+              <a:tr h="306000">
                 <a:tc>
                   <a:txBody>
                     <a:bodyPr/>
@@ -3903,8 +3901,8 @@
                         <a:solidFill>
                           <a:srgbClr val="5F6B7A"/>
                         </a:solidFill>
-                        <a:latin typeface="IBM Plex Sans Arabic"/>
-                        <a:cs typeface="IBM Plex Sans Arabic"/>
+                        <a:latin typeface="IBM Plex Sans Arabic Medium"/>
+                        <a:cs typeface="IBM Plex Sans Arabic Medium"/>
                       </a:endParaRPr>
                     </a:p>
                   </a:txBody>
@@ -3920,7 +3918,7 @@
                     </a:lnT>
                     <a:lnB w="6350" cap="flat" cmpd="sng" algn="ctr">
                       <a:solidFill>
-                        <a:srgbClr val="D9DEE5"/>
+                        <a:srgbClr val="DDE1E8"/>
                       </a:solidFill>
                       <a:prstDash val="solid"/>
                     </a:lnB>
@@ -3942,8 +3940,8 @@
                         <a:solidFill>
                           <a:srgbClr val="5F6B7A"/>
                         </a:solidFill>
-                        <a:latin typeface="IBM Plex Sans Arabic"/>
-                        <a:cs typeface="IBM Plex Sans Arabic"/>
+                        <a:latin typeface="IBM Plex Sans Arabic Medium"/>
+                        <a:cs typeface="IBM Plex Sans Arabic Medium"/>
                       </a:endParaRPr>
                     </a:p>
                   </a:txBody>
@@ -3959,7 +3957,7 @@
                     </a:lnT>
                     <a:lnB w="6350" cap="flat" cmpd="sng" algn="ctr">
                       <a:solidFill>
-                        <a:srgbClr val="D9DEE5"/>
+                        <a:srgbClr val="DDE1E8"/>
                       </a:solidFill>
                       <a:prstDash val="solid"/>
                     </a:lnB>
@@ -3981,8 +3979,8 @@
                         <a:solidFill>
                           <a:srgbClr val="5F6B7A"/>
                         </a:solidFill>
-                        <a:latin typeface="IBM Plex Sans Arabic"/>
-                        <a:cs typeface="IBM Plex Sans Arabic"/>
+                        <a:latin typeface="IBM Plex Sans Arabic Medium"/>
+                        <a:cs typeface="IBM Plex Sans Arabic Medium"/>
                       </a:endParaRPr>
                     </a:p>
                   </a:txBody>
@@ -3998,7 +3996,7 @@
                     </a:lnT>
                     <a:lnB w="6350" cap="flat" cmpd="sng" algn="ctr">
                       <a:solidFill>
-                        <a:srgbClr val="D9DEE5"/>
+                        <a:srgbClr val="DDE1E8"/>
                       </a:solidFill>
                       <a:prstDash val="solid"/>
                     </a:lnB>
@@ -4018,10 +4016,10 @@
                       </a:pPr>
                       <a:endParaRPr lang="ar-SA" sz="1100" dirty="0">
                         <a:solidFill>
-                          <a:srgbClr val="1C2B3A"/>
+                          <a:srgbClr val="1F2A37"/>
                         </a:solidFill>
-                        <a:latin typeface="IBM Plex Sans Arabic"/>
-                        <a:cs typeface="IBM Plex Sans Arabic"/>
+                        <a:latin typeface="IBM Plex Sans Arabic Medium"/>
+                        <a:cs typeface="IBM Plex Sans Arabic Medium"/>
                       </a:endParaRPr>
                     </a:p>
                   </a:txBody>
@@ -4037,7 +4035,7 @@
                     </a:lnT>
                     <a:lnB w="6350" cap="flat" cmpd="sng" algn="ctr">
                       <a:solidFill>
-                        <a:srgbClr val="D9DEE5"/>
+                        <a:srgbClr val="DDE1E8"/>
                       </a:solidFill>
                       <a:prstDash val="solid"/>
                     </a:lnB>
@@ -4045,7 +4043,7 @@
                   </a:tcPr>
                 </a:tc>
               </a:tr>
-              <a:tr h="288000">
+              <a:tr h="306000">
                 <a:tc>
                   <a:txBody>
                     <a:bodyPr/>
@@ -4061,8 +4059,8 @@
                         <a:solidFill>
                           <a:srgbClr val="5F6B7A"/>
                         </a:solidFill>
-                        <a:latin typeface="IBM Plex Sans Arabic"/>
-                        <a:cs typeface="IBM Plex Sans Arabic"/>
+                        <a:latin typeface="IBM Plex Sans Arabic Medium"/>
+                        <a:cs typeface="IBM Plex Sans Arabic Medium"/>
                       </a:endParaRPr>
                     </a:p>
                   </a:txBody>
@@ -4078,7 +4076,7 @@
                     </a:lnT>
                     <a:lnB w="6350" cap="flat" cmpd="sng" algn="ctr">
                       <a:solidFill>
-                        <a:srgbClr val="D9DEE5"/>
+                        <a:srgbClr val="DDE1E8"/>
                       </a:solidFill>
                       <a:prstDash val="solid"/>
                     </a:lnB>
@@ -4100,8 +4098,8 @@
                         <a:solidFill>
                           <a:srgbClr val="5F6B7A"/>
                         </a:solidFill>
-                        <a:latin typeface="IBM Plex Sans Arabic"/>
-                        <a:cs typeface="IBM Plex Sans Arabic"/>
+                        <a:latin typeface="IBM Plex Sans Arabic Medium"/>
+                        <a:cs typeface="IBM Plex Sans Arabic Medium"/>
                       </a:endParaRPr>
                     </a:p>
                   </a:txBody>
@@ -4117,7 +4115,7 @@
                     </a:lnT>
                     <a:lnB w="6350" cap="flat" cmpd="sng" algn="ctr">
                       <a:solidFill>
-                        <a:srgbClr val="D9DEE5"/>
+                        <a:srgbClr val="DDE1E8"/>
                       </a:solidFill>
                       <a:prstDash val="solid"/>
                     </a:lnB>
@@ -4139,8 +4137,8 @@
                         <a:solidFill>
                           <a:srgbClr val="5F6B7A"/>
                         </a:solidFill>
-                        <a:latin typeface="IBM Plex Sans Arabic"/>
-                        <a:cs typeface="IBM Plex Sans Arabic"/>
+                        <a:latin typeface="IBM Plex Sans Arabic Medium"/>
+                        <a:cs typeface="IBM Plex Sans Arabic Medium"/>
                       </a:endParaRPr>
                     </a:p>
                   </a:txBody>
@@ -4156,7 +4154,7 @@
                     </a:lnT>
                     <a:lnB w="6350" cap="flat" cmpd="sng" algn="ctr">
                       <a:solidFill>
-                        <a:srgbClr val="D9DEE5"/>
+                        <a:srgbClr val="DDE1E8"/>
                       </a:solidFill>
                       <a:prstDash val="solid"/>
                     </a:lnB>
@@ -4176,10 +4174,10 @@
                       </a:pPr>
                       <a:endParaRPr lang="ar-SA" sz="1100" dirty="0">
                         <a:solidFill>
-                          <a:srgbClr val="1C2B3A"/>
+                          <a:srgbClr val="1F2A37"/>
                         </a:solidFill>
-                        <a:latin typeface="IBM Plex Sans Arabic"/>
-                        <a:cs typeface="IBM Plex Sans Arabic"/>
+                        <a:latin typeface="IBM Plex Sans Arabic Medium"/>
+                        <a:cs typeface="IBM Plex Sans Arabic Medium"/>
                       </a:endParaRPr>
                     </a:p>
                   </a:txBody>
@@ -4195,7 +4193,7 @@
                     </a:lnT>
                     <a:lnB w="6350" cap="flat" cmpd="sng" algn="ctr">
                       <a:solidFill>
-                        <a:srgbClr val="D9DEE5"/>
+                        <a:srgbClr val="DDE1E8"/>
                       </a:solidFill>
                       <a:prstDash val="solid"/>
                     </a:lnB>
@@ -4203,7 +4201,7 @@
                   </a:tcPr>
                 </a:tc>
               </a:tr>
-              <a:tr h="288000">
+              <a:tr h="306000">
                 <a:tc>
                   <a:txBody>
                     <a:bodyPr/>
@@ -4219,8 +4217,8 @@
                         <a:solidFill>
                           <a:srgbClr val="5F6B7A"/>
                         </a:solidFill>
-                        <a:latin typeface="IBM Plex Sans Arabic"/>
-                        <a:cs typeface="IBM Plex Sans Arabic"/>
+                        <a:latin typeface="IBM Plex Sans Arabic Medium"/>
+                        <a:cs typeface="IBM Plex Sans Arabic Medium"/>
                       </a:endParaRPr>
                     </a:p>
                   </a:txBody>
@@ -4236,7 +4234,7 @@
                     </a:lnT>
                     <a:lnB w="6350" cap="flat" cmpd="sng" algn="ctr">
                       <a:solidFill>
-                        <a:srgbClr val="D9DEE5"/>
+                        <a:srgbClr val="DDE1E8"/>
                       </a:solidFill>
                       <a:prstDash val="solid"/>
                     </a:lnB>
@@ -4258,8 +4256,8 @@
                         <a:solidFill>
                           <a:srgbClr val="5F6B7A"/>
                         </a:solidFill>
-                        <a:latin typeface="IBM Plex Sans Arabic"/>
-                        <a:cs typeface="IBM Plex Sans Arabic"/>
+                        <a:latin typeface="IBM Plex Sans Arabic Medium"/>
+                        <a:cs typeface="IBM Plex Sans Arabic Medium"/>
                       </a:endParaRPr>
                     </a:p>
                   </a:txBody>
@@ -4275,7 +4273,7 @@
                     </a:lnT>
                     <a:lnB w="6350" cap="flat" cmpd="sng" algn="ctr">
                       <a:solidFill>
-                        <a:srgbClr val="D9DEE5"/>
+                        <a:srgbClr val="DDE1E8"/>
                       </a:solidFill>
                       <a:prstDash val="solid"/>
                     </a:lnB>
@@ -4297,8 +4295,8 @@
                         <a:solidFill>
                           <a:srgbClr val="5F6B7A"/>
                         </a:solidFill>
-                        <a:latin typeface="IBM Plex Sans Arabic"/>
-                        <a:cs typeface="IBM Plex Sans Arabic"/>
+                        <a:latin typeface="IBM Plex Sans Arabic Medium"/>
+                        <a:cs typeface="IBM Plex Sans Arabic Medium"/>
                       </a:endParaRPr>
                     </a:p>
                   </a:txBody>
@@ -4314,7 +4312,7 @@
                     </a:lnT>
                     <a:lnB w="6350" cap="flat" cmpd="sng" algn="ctr">
                       <a:solidFill>
-                        <a:srgbClr val="D9DEE5"/>
+                        <a:srgbClr val="DDE1E8"/>
                       </a:solidFill>
                       <a:prstDash val="solid"/>
                     </a:lnB>
@@ -4334,10 +4332,10 @@
                       </a:pPr>
                       <a:endParaRPr lang="ar-SA" sz="1100" dirty="0">
                         <a:solidFill>
-                          <a:srgbClr val="1C2B3A"/>
+                          <a:srgbClr val="1F2A37"/>
                         </a:solidFill>
-                        <a:latin typeface="IBM Plex Sans Arabic"/>
-                        <a:cs typeface="IBM Plex Sans Arabic"/>
+                        <a:latin typeface="IBM Plex Sans Arabic Medium"/>
+                        <a:cs typeface="IBM Plex Sans Arabic Medium"/>
                       </a:endParaRPr>
                     </a:p>
                   </a:txBody>
@@ -4353,7 +4351,7 @@
                     </a:lnT>
                     <a:lnB w="6350" cap="flat" cmpd="sng" algn="ctr">
                       <a:solidFill>
-                        <a:srgbClr val="D9DEE5"/>
+                        <a:srgbClr val="DDE1E8"/>
                       </a:solidFill>
                       <a:prstDash val="solid"/>
                     </a:lnB>
@@ -4398,7 +4396,7 @@
             <a:avLst/>
           </a:prstGeom>
           <a:solidFill>
-            <a:srgbClr val="0B1F3F"/>
+            <a:srgbClr val="273470"/>
           </a:solidFill>
           <a:ln>
             <a:noFill/>
@@ -4473,7 +4471,7 @@
             <a:r>
               <a:rPr lang="ar-SA" sz="1050" dirty="0">
                 <a:solidFill>
-                  <a:srgbClr val="6CC04A"/>
+                  <a:srgbClr val="33CC99"/>
                 </a:solidFill>
                 <a:latin typeface="IBM Plex Sans Arabic"/>
                 <a:cs typeface="IBM Plex Sans Arabic"/>
@@ -4512,7 +4510,7 @@
             <a:r>
               <a:rPr lang="ar-SA" sz="1400" b="1" dirty="0">
                 <a:solidFill>
-                  <a:srgbClr val="0B1F3F"/>
+                  <a:srgbClr val="273470"/>
                 </a:solidFill>
                 <a:latin typeface="IBM Plex Sans Arabic"/>
                 <a:cs typeface="IBM Plex Sans Arabic"/>
@@ -4537,7 +4535,7 @@
             <a:avLst/>
           </a:prstGeom>
           <a:solidFill>
-            <a:srgbClr val="12A5A8"/>
+            <a:srgbClr val="0E8A8A"/>
           </a:solidFill>
           <a:ln>
             <a:noFill/>
@@ -4592,7 +4590,7 @@
             <a:r>
               <a:rPr lang="ar-SA" sz="1200" b="1" dirty="0">
                 <a:solidFill>
-                  <a:srgbClr val="0E7C86"/>
+                  <a:srgbClr val="0E8A8A"/>
                 </a:solidFill>
                 <a:latin typeface="IBM Plex Sans Arabic"/>
                 <a:cs typeface="IBM Plex Sans Arabic"/>
@@ -4634,7 +4632,7 @@
             <a:r>
               <a:rPr lang="ar-SA" sz="1050" dirty="0">
                 <a:solidFill>
-                  <a:srgbClr val="1C2B3A"/>
+                  <a:srgbClr val="1F2A37"/>
                 </a:solidFill>
                 <a:latin typeface="IBM Plex Sans Arabic"/>
                 <a:cs typeface="IBM Plex Sans Arabic"/>
@@ -4659,7 +4657,7 @@
             <a:avLst/>
           </a:prstGeom>
           <a:solidFill>
-            <a:srgbClr val="12A5A8"/>
+            <a:srgbClr val="0E8A8A"/>
           </a:solidFill>
           <a:ln>
             <a:noFill/>
@@ -4714,7 +4712,7 @@
             <a:r>
               <a:rPr lang="ar-SA" sz="1200" b="1" dirty="0">
                 <a:solidFill>
-                  <a:srgbClr val="0E7C86"/>
+                  <a:srgbClr val="0E8A8A"/>
                 </a:solidFill>
                 <a:latin typeface="IBM Plex Sans Arabic"/>
                 <a:cs typeface="IBM Plex Sans Arabic"/>
@@ -4756,7 +4754,7 @@
             <a:r>
               <a:rPr lang="ar-SA" sz="1050" dirty="0">
                 <a:solidFill>
-                  <a:srgbClr val="1C2B3A"/>
+                  <a:srgbClr val="1F2A37"/>
                 </a:solidFill>
                 <a:latin typeface="IBM Plex Sans Arabic"/>
                 <a:cs typeface="IBM Plex Sans Arabic"/>
@@ -4781,7 +4779,7 @@
             <a:avLst/>
           </a:prstGeom>
           <a:solidFill>
-            <a:srgbClr val="12A5A8"/>
+            <a:srgbClr val="0E8A8A"/>
           </a:solidFill>
           <a:ln>
             <a:noFill/>
@@ -4836,7 +4834,7 @@
             <a:r>
               <a:rPr lang="ar-SA" sz="1200" b="1" dirty="0">
                 <a:solidFill>
-                  <a:srgbClr val="0E7C86"/>
+                  <a:srgbClr val="0E8A8A"/>
                 </a:solidFill>
                 <a:latin typeface="IBM Plex Sans Arabic"/>
                 <a:cs typeface="IBM Plex Sans Arabic"/>
@@ -4878,7 +4876,7 @@
             <a:r>
               <a:rPr lang="ar-SA" sz="1050" dirty="0">
                 <a:solidFill>
-                  <a:srgbClr val="1C2B3A"/>
+                  <a:srgbClr val="1F2A37"/>
                 </a:solidFill>
                 <a:latin typeface="IBM Plex Sans Arabic"/>
                 <a:cs typeface="IBM Plex Sans Arabic"/>
@@ -4903,7 +4901,7 @@
             <a:avLst/>
           </a:prstGeom>
           <a:solidFill>
-            <a:srgbClr val="12A5A8"/>
+            <a:srgbClr val="0E8A8A"/>
           </a:solidFill>
           <a:ln>
             <a:noFill/>
@@ -4958,7 +4956,7 @@
             <a:r>
               <a:rPr lang="ar-SA" sz="1200" b="1" dirty="0">
                 <a:solidFill>
-                  <a:srgbClr val="0E7C86"/>
+                  <a:srgbClr val="0E8A8A"/>
                 </a:solidFill>
                 <a:latin typeface="IBM Plex Sans Arabic"/>
                 <a:cs typeface="IBM Plex Sans Arabic"/>
@@ -5000,7 +4998,7 @@
             <a:r>
               <a:rPr lang="ar-SA" sz="1050" dirty="0">
                 <a:solidFill>
-                  <a:srgbClr val="1C2B3A"/>
+                  <a:srgbClr val="1F2A37"/>
                 </a:solidFill>
                 <a:latin typeface="IBM Plex Sans Arabic"/>
                 <a:cs typeface="IBM Plex Sans Arabic"/>
@@ -5025,7 +5023,7 @@
             <a:avLst/>
           </a:prstGeom>
           <a:solidFill>
-            <a:srgbClr val="12A5A8"/>
+            <a:srgbClr val="0E8A8A"/>
           </a:solidFill>
           <a:ln>
             <a:noFill/>
@@ -5080,7 +5078,7 @@
             <a:r>
               <a:rPr lang="ar-SA" sz="1200" b="1" dirty="0">
                 <a:solidFill>
-                  <a:srgbClr val="0E7C86"/>
+                  <a:srgbClr val="0E8A8A"/>
                 </a:solidFill>
                 <a:latin typeface="IBM Plex Sans Arabic"/>
                 <a:cs typeface="IBM Plex Sans Arabic"/>
@@ -5122,7 +5120,7 @@
             <a:r>
               <a:rPr lang="ar-SA" sz="1050" dirty="0">
                 <a:solidFill>
-                  <a:srgbClr val="1C2B3A"/>
+                  <a:srgbClr val="1F2A37"/>
                 </a:solidFill>
                 <a:latin typeface="IBM Plex Sans Arabic"/>
                 <a:cs typeface="IBM Plex Sans Arabic"/>
@@ -5147,7 +5145,7 @@
             <a:avLst/>
           </a:prstGeom>
           <a:solidFill>
-            <a:srgbClr val="12A5A8"/>
+            <a:srgbClr val="0E8A8A"/>
           </a:solidFill>
           <a:ln>
             <a:noFill/>
@@ -5202,7 +5200,7 @@
             <a:r>
               <a:rPr lang="ar-SA" sz="1200" b="1" dirty="0">
                 <a:solidFill>
-                  <a:srgbClr val="0E7C86"/>
+                  <a:srgbClr val="0E8A8A"/>
                 </a:solidFill>
                 <a:latin typeface="IBM Plex Sans Arabic"/>
                 <a:cs typeface="IBM Plex Sans Arabic"/>
@@ -5244,7 +5242,7 @@
             <a:r>
               <a:rPr lang="ar-SA" sz="1050" dirty="0">
                 <a:solidFill>
-                  <a:srgbClr val="1C2B3A"/>
+                  <a:srgbClr val="1F2A37"/>
                 </a:solidFill>
                 <a:latin typeface="IBM Plex Sans Arabic"/>
                 <a:cs typeface="IBM Plex Sans Arabic"/>
@@ -5269,7 +5267,7 @@
             <a:avLst/>
           </a:prstGeom>
           <a:solidFill>
-            <a:srgbClr val="12A5A8"/>
+            <a:srgbClr val="0E8A8A"/>
           </a:solidFill>
           <a:ln>
             <a:noFill/>
@@ -5324,7 +5322,7 @@
             <a:r>
               <a:rPr lang="ar-SA" sz="1200" b="1" dirty="0">
                 <a:solidFill>
-                  <a:srgbClr val="0E7C86"/>
+                  <a:srgbClr val="0E8A8A"/>
                 </a:solidFill>
                 <a:latin typeface="IBM Plex Sans Arabic"/>
                 <a:cs typeface="IBM Plex Sans Arabic"/>
@@ -5366,7 +5364,7 @@
             <a:r>
               <a:rPr lang="ar-SA" sz="1050" dirty="0">
                 <a:solidFill>
-                  <a:srgbClr val="1C2B3A"/>
+                  <a:srgbClr val="1F2A37"/>
                 </a:solidFill>
                 <a:latin typeface="IBM Plex Sans Arabic"/>
                 <a:cs typeface="IBM Plex Sans Arabic"/>
@@ -5391,7 +5389,7 @@
             <a:avLst/>
           </a:prstGeom>
           <a:solidFill>
-            <a:srgbClr val="12A5A8"/>
+            <a:srgbClr val="0E8A8A"/>
           </a:solidFill>
           <a:ln>
             <a:noFill/>
@@ -5446,7 +5444,7 @@
             <a:r>
               <a:rPr lang="ar-SA" sz="1200" b="1" dirty="0">
                 <a:solidFill>
-                  <a:srgbClr val="0E7C86"/>
+                  <a:srgbClr val="0E8A8A"/>
                 </a:solidFill>
                 <a:latin typeface="IBM Plex Sans Arabic"/>
                 <a:cs typeface="IBM Plex Sans Arabic"/>
@@ -5488,7 +5486,7 @@
             <a:r>
               <a:rPr lang="ar-SA" sz="1050" dirty="0">
                 <a:solidFill>
-                  <a:srgbClr val="1C2B3A"/>
+                  <a:srgbClr val="1F2A37"/>
                 </a:solidFill>
                 <a:latin typeface="IBM Plex Sans Arabic"/>
                 <a:cs typeface="IBM Plex Sans Arabic"/>
@@ -5527,7 +5525,7 @@
             <a:r>
               <a:rPr lang="ar-SA" sz="800" dirty="0">
                 <a:solidFill>
-                  <a:srgbClr val="8A95A3"/>
+                  <a:srgbClr val="6C727E"/>
                 </a:solidFill>
                 <a:latin typeface="IBM Plex Sans Arabic"/>
                 <a:cs typeface="IBM Plex Sans Arabic"/>
@@ -5550,40 +5548,40 @@
   <a:themeElements>
     <a:clrScheme name="SDAIA-inspired">
       <a:dk1>
-        <a:srgbClr val="1C2B3A"/>
+        <a:srgbClr val="1F2A37"/>
       </a:dk1>
       <a:lt1>
         <a:srgbClr val="FFFFFF"/>
       </a:lt1>
       <a:dk2>
-        <a:srgbClr val="0B1F3F"/>
+        <a:srgbClr val="273470"/>
       </a:dk2>
       <a:lt2>
-        <a:srgbClr val="EEF2F8"/>
+        <a:srgbClr val="EEF0F8"/>
       </a:lt2>
       <a:accent1>
-        <a:srgbClr val="12A5A8"/>
+        <a:srgbClr val="33CC99"/>
       </a:accent1>
       <a:accent2>
-        <a:srgbClr val="6CC04A"/>
+        <a:srgbClr val="6459A7"/>
       </a:accent2>
       <a:accent3>
-        <a:srgbClr val="14315E"/>
+        <a:srgbClr val="0E8A8A"/>
       </a:accent3>
       <a:accent4>
-        <a:srgbClr val="D98B1F"/>
+        <a:srgbClr val="99D633"/>
       </a:accent4>
       <a:accent5>
-        <a:srgbClr val="0E7C86"/>
+        <a:srgbClr val="66CCFF"/>
       </a:accent5>
       <a:accent6>
-        <a:srgbClr val="5F6B7A"/>
+        <a:srgbClr val="DC6803"/>
       </a:accent6>
       <a:hlink>
-        <a:srgbClr val="0E7C86"/>
+        <a:srgbClr val="0E8A8A"/>
       </a:hlink>
       <a:folHlink>
-        <a:srgbClr val="5F6B7A"/>
+        <a:srgbClr val="6459A7"/>
       </a:folHlink>
     </a:clrScheme>
     <a:fontScheme name="Office">
